--- a/docs/2ndSTAGEの成果_8月執行役員会用_P2追加.pptx
+++ b/docs/2ndSTAGEの成果_8月執行役員会用_P2追加.pptx
@@ -8896,12 +8896,9 @@
                           <a:latin typeface="BIZ UDPゴシック" panose="020B0400000000000000" pitchFamily="50" charset="-128"/>
                           <a:ea typeface="BIZ UDPゴシック" panose="020B0400000000000000" pitchFamily="50" charset="-128"/>
                         </a:rPr>
-                        <a:t>担当：　中林 執行役員</a:t>
-                      </a:r>
-                      <a:endParaRPr kumimoji="1" lang="ja-JP" altLang="en-US" sz="1600" b="1" dirty="0">
-                        <a:solidFill>
-                          <a:schemeClr val="bg1"/>
-                        </a:solidFill>
+                        <a:t>担当：　XX</a:t>
+                      </a:r>
+                      <a:endParaRPr kumimoji="1" lang="ja-JP" altLang="en-US" sz="1600" dirty="0">
                         <a:latin typeface="BIZ UDPゴシック" panose="020B0400000000000000" pitchFamily="50" charset="-128"/>
                         <a:ea typeface="BIZ UDPゴシック" panose="020B0400000000000000" pitchFamily="50" charset="-128"/>
                       </a:endParaRPr>
@@ -8996,7 +8993,14 @@
                           <a:latin typeface="BIZ UDPゴシック" panose="020B0400000000000000" pitchFamily="50" charset="-128"/>
                           <a:ea typeface="BIZ UDPゴシック" panose="020B0400000000000000" pitchFamily="50" charset="-128"/>
                         </a:rPr>
-                        <a:t>データ一元化による連結経営数値把握サイクルの短縮</a:t>
+                        <a:t>データ一元化による連結経営数値把握の短サイクル化</a:t>
+                      </a:r>
+                      <a:r>
+                        <a:rPr kumimoji="1" lang="ja-JP" altLang="en-US" sz="1600" b="1" dirty="0">
+                          <a:latin typeface="BIZ UDPゴシック" panose="020B0400000000000000" pitchFamily="50" charset="-128"/>
+                          <a:ea typeface="BIZ UDPゴシック" panose="020B0400000000000000" pitchFamily="50" charset="-128"/>
+                        </a:rPr>
+                        <a:t>【現在の把握】</a:t>
                       </a:r>
                       <a:endParaRPr kumimoji="1" lang="ja-JP" altLang="en-US" sz="1600" dirty="0">
                         <a:latin typeface="BIZ UDPゴシック" panose="020B0400000000000000" pitchFamily="50" charset="-128"/>
@@ -9019,7 +9023,7 @@
                           <a:latin typeface="BIZ UDPゴシック" panose="020B0400000000000000" pitchFamily="50" charset="-128"/>
                           <a:ea typeface="BIZ UDPゴシック" panose="020B0400000000000000" pitchFamily="50" charset="-128"/>
                         </a:rPr>
-                        <a:t>売上・利益等の未来予測機能の実装</a:t>
+                        <a:t>売上・利益等の未来予測</a:t>
                       </a:r>
                       <a:r>
                         <a:rPr kumimoji="1" lang="ja-JP" altLang="en-US" sz="1600" dirty="0">
@@ -9027,6 +9031,13 @@
                           <a:ea typeface="BIZ UDPゴシック" panose="020B0400000000000000" pitchFamily="50" charset="-128"/>
                         </a:rPr>
                         <a:t>による計画未達の未然防止</a:t>
+                      </a:r>
+                      <a:r>
+                        <a:rPr kumimoji="1" lang="ja-JP" altLang="en-US" sz="1600" b="1" dirty="0">
+                          <a:latin typeface="BIZ UDPゴシック" panose="020B0400000000000000" pitchFamily="50" charset="-128"/>
+                          <a:ea typeface="BIZ UDPゴシック" panose="020B0400000000000000" pitchFamily="50" charset="-128"/>
+                        </a:rPr>
+                        <a:t>【未来の予見】</a:t>
                       </a:r>
                       <a:endParaRPr kumimoji="1" lang="ja-JP" altLang="en-US" sz="1600" dirty="0">
                         <a:latin typeface="BIZ UDPゴシック" panose="020B0400000000000000" pitchFamily="50" charset="-128"/>
@@ -9218,7 +9229,7 @@
                           <a:latin typeface="BIZ UDPゴシック" panose="020B0400000000000000" pitchFamily="50" charset="-128"/>
                           <a:ea typeface="BIZ UDPゴシック" panose="020B0400000000000000" pitchFamily="50" charset="-128"/>
                         </a:rPr>
-                        <a:t>◇経営指標の「視える化」を計画通り完遂し、</a:t>
+                        <a:t>◇3カ年計画「視える化→客観化→最適化」を完遂し、</a:t>
                       </a:r>
                       <a:r>
                         <a:rPr kumimoji="1" lang="ja-JP" altLang="en-US" sz="1600" dirty="0">
@@ -9228,14 +9239,7 @@
                           <a:latin typeface="BIZ UDPゴシック" panose="020B0400000000000000" pitchFamily="50" charset="-128"/>
                           <a:ea typeface="BIZ UDPゴシック" panose="020B0400000000000000" pitchFamily="50" charset="-128"/>
                         </a:rPr>
-                        <a:t>後行管理から先行管理への転換</a:t>
-                      </a:r>
-                      <a:r>
-                        <a:rPr kumimoji="1" lang="ja-JP" altLang="en-US" sz="1600" dirty="0">
-                          <a:latin typeface="BIZ UDPゴシック" panose="020B0400000000000000" pitchFamily="50" charset="-128"/>
-                          <a:ea typeface="BIZ UDPゴシック" panose="020B0400000000000000" pitchFamily="50" charset="-128"/>
-                        </a:rPr>
-                        <a:t>を開始</a:t>
+                        <a:t>先行管理へ転換</a:t>
                       </a:r>
                       <a:endParaRPr kumimoji="1" lang="ja-JP" altLang="en-US" sz="1600" dirty="0">
                         <a:latin typeface="BIZ UDPゴシック" panose="020B0400000000000000" pitchFamily="50" charset="-128"/>
@@ -9293,11 +9297,11 @@
                     </a:p>
                     <a:p>
                       <a:r>
-                        <a:rPr kumimoji="1" lang="ja-JP" altLang="en-US" sz="1600" dirty="0">
-                          <a:latin typeface="BIZ UDPゴシック" panose="020B0400000000000000" pitchFamily="50" charset="-128"/>
-                          <a:ea typeface="BIZ UDPゴシック" panose="020B0400000000000000" pitchFamily="50" charset="-128"/>
-                        </a:rPr>
-                        <a:t>・（視える化） </a:t>
+                        <a:rPr kumimoji="1" lang="ja-JP" altLang="en-US" sz="1600" b="1" dirty="0">
+                          <a:latin typeface="BIZ UDPゴシック" panose="020B0400000000000000" pitchFamily="50" charset="-128"/>
+                          <a:ea typeface="BIZ UDPゴシック" panose="020B0400000000000000" pitchFamily="50" charset="-128"/>
+                        </a:rPr>
+                        <a:t>・（視える化：25年） </a:t>
                       </a:r>
                       <a:r>
                         <a:rPr kumimoji="1" lang="ja-JP" altLang="en-US" sz="1600" dirty="0">
@@ -9307,7 +9311,7 @@
                           <a:latin typeface="BIZ UDPゴシック" panose="020B0400000000000000" pitchFamily="50" charset="-128"/>
                           <a:ea typeface="BIZ UDPゴシック" panose="020B0400000000000000" pitchFamily="50" charset="-128"/>
                         </a:rPr>
-                        <a:t>25年10月 経営ダッシュボード稼働：実績把握を2週間前倒し</a:t>
+                        <a:t>経営ダッシュボード稼働：実績把握を2週間前倒し</a:t>
                       </a:r>
                       <a:r>
                         <a:rPr kumimoji="1" lang="ja-JP" altLang="en-US" sz="1600" dirty="0">
@@ -9323,11 +9327,11 @@
                     </a:p>
                     <a:p>
                       <a:r>
-                        <a:rPr kumimoji="1" lang="ja-JP" altLang="en-US" sz="1600" dirty="0">
-                          <a:latin typeface="BIZ UDPゴシック" panose="020B0400000000000000" pitchFamily="50" charset="-128"/>
-                          <a:ea typeface="BIZ UDPゴシック" panose="020B0400000000000000" pitchFamily="50" charset="-128"/>
-                        </a:rPr>
-                        <a:t>・（見通しの客観化） </a:t>
+                        <a:rPr kumimoji="1" lang="ja-JP" altLang="en-US" sz="1600" b="1" dirty="0">
+                          <a:latin typeface="BIZ UDPゴシック" panose="020B0400000000000000" pitchFamily="50" charset="-128"/>
+                          <a:ea typeface="BIZ UDPゴシック" panose="020B0400000000000000" pitchFamily="50" charset="-128"/>
+                        </a:rPr>
+                        <a:t>・（客観化：26年） </a:t>
                       </a:r>
                       <a:r>
                         <a:rPr kumimoji="1" lang="ja-JP" altLang="en-US" sz="1600" dirty="0">
@@ -9337,7 +9341,7 @@
                           <a:latin typeface="BIZ UDPゴシック" panose="020B0400000000000000" pitchFamily="50" charset="-128"/>
                           <a:ea typeface="BIZ UDPゴシック" panose="020B0400000000000000" pitchFamily="50" charset="-128"/>
                         </a:rPr>
-                        <a:t>26年1月 AI着地予測を実装：現場見通しの客観チェック</a:t>
+                        <a:t>国内売上のAI着地予測を実装：現場見通しの客観チェック</a:t>
                       </a:r>
                       <a:r>
                         <a:rPr kumimoji="1" lang="ja-JP" altLang="en-US" sz="1600" dirty="0">
@@ -9353,11 +9357,18 @@
                     </a:p>
                     <a:p>
                       <a:r>
+                        <a:rPr kumimoji="1" lang="ja-JP" altLang="en-US" sz="1600" b="1" dirty="0">
+                          <a:latin typeface="BIZ UDPゴシック" panose="020B0400000000000000" pitchFamily="50" charset="-128"/>
+                          <a:ea typeface="BIZ UDPゴシック" panose="020B0400000000000000" pitchFamily="50" charset="-128"/>
+                        </a:rPr>
+                        <a:t>・（最適化：27年） </a:t>
+                      </a:r>
+                      <a:r>
                         <a:rPr kumimoji="1" lang="ja-JP" altLang="en-US" sz="1600" dirty="0">
                           <a:latin typeface="BIZ UDPゴシック" panose="020B0400000000000000" pitchFamily="50" charset="-128"/>
                           <a:ea typeface="BIZ UDPゴシック" panose="020B0400000000000000" pitchFamily="50" charset="-128"/>
                         </a:rPr>
-                        <a:t>・（意思決定の最適化） </a:t>
+                        <a:t>国内：</a:t>
                       </a:r>
                       <a:r>
                         <a:rPr kumimoji="1" lang="ja-JP" altLang="en-US" sz="1600" dirty="0">
@@ -9367,7 +9378,24 @@
                           <a:latin typeface="BIZ UDPゴシック" panose="020B0400000000000000" pitchFamily="50" charset="-128"/>
                           <a:ea typeface="BIZ UDPゴシック" panose="020B0400000000000000" pitchFamily="50" charset="-128"/>
                         </a:rPr>
-                        <a:t>海外データ自動連携と先行管理型の経営執行の定着</a:t>
+                        <a:t>先行管理型経営の定着</a:t>
+                      </a:r>
+                      <a:r>
+                        <a:rPr kumimoji="1" lang="ja-JP" altLang="en-US" sz="1600" dirty="0">
+                          <a:latin typeface="BIZ UDPゴシック" panose="020B0400000000000000" pitchFamily="50" charset="-128"/>
+                          <a:ea typeface="BIZ UDPゴシック" panose="020B0400000000000000" pitchFamily="50" charset="-128"/>
+                        </a:rPr>
+                        <a:t>／海外：</a:t>
+                      </a:r>
+                      <a:r>
+                        <a:rPr kumimoji="1" lang="ja-JP" altLang="en-US" sz="1600" dirty="0">
+                          <a:solidFill>
+                            <a:srgbClr val="00B0F0"/>
+                          </a:solidFill>
+                          <a:latin typeface="BIZ UDPゴシック" panose="020B0400000000000000" pitchFamily="50" charset="-128"/>
+                          <a:ea typeface="BIZ UDPゴシック" panose="020B0400000000000000" pitchFamily="50" charset="-128"/>
+                        </a:rPr>
+                        <a:t>省力化したデータ自動連携</a:t>
                       </a:r>
                       <a:endParaRPr kumimoji="1" lang="ja-JP" altLang="en-US" sz="1600" dirty="0">
                         <a:latin typeface="BIZ UDPゴシック" panose="020B0400000000000000" pitchFamily="50" charset="-128"/>
@@ -9477,11 +9505,11 @@
                     <a:lstStyle/>
                     <a:p>
                       <a:r>
-                        <a:rPr kumimoji="1" lang="ja-JP" altLang="en-US" sz="1600" dirty="0">
-                          <a:latin typeface="BIZ UDPゴシック" panose="020B0400000000000000" pitchFamily="50" charset="-128"/>
-                          <a:ea typeface="BIZ UDPゴシック" panose="020B0400000000000000" pitchFamily="50" charset="-128"/>
-                        </a:rPr>
-                        <a:t>・</a:t>
+                        <a:rPr kumimoji="1" lang="ja-JP" altLang="en-US" sz="1600" b="1" dirty="0">
+                          <a:latin typeface="BIZ UDPゴシック" panose="020B0400000000000000" pitchFamily="50" charset="-128"/>
+                          <a:ea typeface="BIZ UDPゴシック" panose="020B0400000000000000" pitchFamily="50" charset="-128"/>
+                        </a:rPr>
+                        <a:t>・【予見：デジタル】</a:t>
                       </a:r>
                       <a:r>
                         <a:rPr kumimoji="1" lang="ja-JP" altLang="en-US" sz="1600" dirty="0">
@@ -9491,14 +9519,7 @@
                           <a:latin typeface="BIZ UDPゴシック" panose="020B0400000000000000" pitchFamily="50" charset="-128"/>
                           <a:ea typeface="BIZ UDPゴシック" panose="020B0400000000000000" pitchFamily="50" charset="-128"/>
                         </a:rPr>
-                        <a:t>ドライバーベースの動的シミュレーション</a:t>
-                      </a:r>
-                      <a:r>
-                        <a:rPr kumimoji="1" lang="ja-JP" altLang="en-US" sz="1600" dirty="0">
-                          <a:latin typeface="BIZ UDPゴシック" panose="020B0400000000000000" pitchFamily="50" charset="-128"/>
-                          <a:ea typeface="BIZ UDPゴシック" panose="020B0400000000000000" pitchFamily="50" charset="-128"/>
-                        </a:rPr>
-                        <a:t>（為替・原価変動→連結P/L影響の先読み）</a:t>
+                        <a:t>AI着地予測の海外展開（QDL先行）と動的シミュレーション</a:t>
                       </a:r>
                       <a:endParaRPr kumimoji="1" lang="ja-JP" altLang="en-US" sz="1600" dirty="0">
                         <a:latin typeface="BIZ UDPゴシック" panose="020B0400000000000000" pitchFamily="50" charset="-128"/>
@@ -9507,11 +9528,11 @@
                     </a:p>
                     <a:p>
                       <a:r>
-                        <a:rPr kumimoji="1" lang="ja-JP" altLang="en-US" sz="1600" dirty="0">
-                          <a:latin typeface="BIZ UDPゴシック" panose="020B0400000000000000" pitchFamily="50" charset="-128"/>
-                          <a:ea typeface="BIZ UDPゴシック" panose="020B0400000000000000" pitchFamily="50" charset="-128"/>
-                        </a:rPr>
-                        <a:t>・</a:t>
+                        <a:rPr kumimoji="1" lang="ja-JP" altLang="en-US" sz="1600" b="1" dirty="0">
+                          <a:latin typeface="BIZ UDPゴシック" panose="020B0400000000000000" pitchFamily="50" charset="-128"/>
+                          <a:ea typeface="BIZ UDPゴシック" panose="020B0400000000000000" pitchFamily="50" charset="-128"/>
+                        </a:rPr>
+                        <a:t>・【対応：プロセス】</a:t>
                       </a:r>
                       <a:r>
                         <a:rPr kumimoji="1" lang="ja-JP" altLang="en-US" sz="1600" dirty="0">
@@ -9521,14 +9542,14 @@
                           <a:latin typeface="BIZ UDPゴシック" panose="020B0400000000000000" pitchFamily="50" charset="-128"/>
                           <a:ea typeface="BIZ UDPゴシック" panose="020B0400000000000000" pitchFamily="50" charset="-128"/>
                         </a:rPr>
-                        <a:t>AI着地予測の海外展開（QDL先行）と代替策ダッシュボード</a:t>
+                        <a:t>代替策ダッシュボード</a:t>
                       </a:r>
                       <a:r>
                         <a:rPr kumimoji="1" lang="ja-JP" altLang="en-US" sz="1600" dirty="0">
                           <a:latin typeface="BIZ UDPゴシック" panose="020B0400000000000000" pitchFamily="50" charset="-128"/>
                           <a:ea typeface="BIZ UDPゴシック" panose="020B0400000000000000" pitchFamily="50" charset="-128"/>
                         </a:rPr>
-                        <a:t>（下振れアラート）</a:t>
+                        <a:t>（下振れアラート＋リカバリー策）</a:t>
                       </a:r>
                       <a:endParaRPr kumimoji="1" lang="ja-JP" altLang="en-US" sz="1600" dirty="0">
                         <a:latin typeface="BIZ UDPゴシック" panose="020B0400000000000000" pitchFamily="50" charset="-128"/>
@@ -9537,11 +9558,11 @@
                     </a:p>
                     <a:p>
                       <a:r>
-                        <a:rPr kumimoji="1" lang="ja-JP" altLang="en-US" sz="1600" dirty="0">
-                          <a:latin typeface="BIZ UDPゴシック" panose="020B0400000000000000" pitchFamily="50" charset="-128"/>
-                          <a:ea typeface="BIZ UDPゴシック" panose="020B0400000000000000" pitchFamily="50" charset="-128"/>
-                        </a:rPr>
-                        <a:t>・</a:t>
+                        <a:rPr kumimoji="1" lang="ja-JP" altLang="en-US" sz="1600" b="1" dirty="0">
+                          <a:latin typeface="BIZ UDPゴシック" panose="020B0400000000000000" pitchFamily="50" charset="-128"/>
+                          <a:ea typeface="BIZ UDPゴシック" panose="020B0400000000000000" pitchFamily="50" charset="-128"/>
+                        </a:rPr>
+                        <a:t>・【規律：ガバナンス】</a:t>
                       </a:r>
                       <a:r>
                         <a:rPr kumimoji="1" lang="ja-JP" altLang="en-US" sz="1600" dirty="0">
@@ -9551,7 +9572,7 @@
                           <a:latin typeface="BIZ UDPゴシック" panose="020B0400000000000000" pitchFamily="50" charset="-128"/>
                           <a:ea typeface="BIZ UDPゴシック" panose="020B0400000000000000" pitchFamily="50" charset="-128"/>
                         </a:rPr>
-                        <a:t>本社・現地のKGI/KPI整合と「計画と着地予測の分離」</a:t>
+                        <a:t>KGI/KPI整合と「計画と着地予測の分離」</a:t>
                       </a:r>
                       <a:r>
                         <a:rPr kumimoji="1" lang="ja-JP" altLang="en-US" sz="1600" dirty="0">
@@ -9571,7 +9592,7 @@
                           <a:latin typeface="BIZ UDPゴシック" panose="020B0400000000000000" pitchFamily="50" charset="-128"/>
                           <a:ea typeface="BIZ UDPゴシック" panose="020B0400000000000000" pitchFamily="50" charset="-128"/>
                         </a:rPr>
-                        <a:t>※指標オペレーションコストを</a:t>
+                        <a:t>※国内外の指標オペレーションコストを</a:t>
                       </a:r>
                       <a:r>
                         <a:rPr kumimoji="1" lang="ja-JP" altLang="en-US" sz="1600" dirty="0">
@@ -9581,14 +9602,14 @@
                           <a:latin typeface="BIZ UDPゴシック" panose="020B0400000000000000" pitchFamily="50" charset="-128"/>
                           <a:ea typeface="BIZ UDPゴシック" panose="020B0400000000000000" pitchFamily="50" charset="-128"/>
                         </a:rPr>
-                        <a:t>46%効率化</a:t>
+                        <a:t>50%以上効率化</a:t>
                       </a:r>
                       <a:r>
                         <a:rPr kumimoji="1" lang="ja-JP" altLang="en-US" sz="1600" dirty="0">
                           <a:latin typeface="BIZ UDPゴシック" panose="020B0400000000000000" pitchFamily="50" charset="-128"/>
                           <a:ea typeface="BIZ UDPゴシック" panose="020B0400000000000000" pitchFamily="50" charset="-128"/>
                         </a:rPr>
-                        <a:t>し、分析・意思決定へ労力をシフト</a:t>
+                        <a:t>し、分析へ労力シフト</a:t>
                       </a:r>
                       <a:endParaRPr kumimoji="1" lang="ja-JP" altLang="en-US" sz="1600" dirty="0">
                         <a:latin typeface="BIZ UDPゴシック" panose="020B0400000000000000" pitchFamily="50" charset="-128"/>
@@ -9659,11 +9680,11 @@
                     <a:lstStyle/>
                     <a:p>
                       <a:r>
-                        <a:rPr kumimoji="1" lang="ja-JP" altLang="en-US" sz="1600" dirty="0">
-                          <a:latin typeface="BIZ UDPゴシック" panose="020B0400000000000000" pitchFamily="50" charset="-128"/>
-                          <a:ea typeface="BIZ UDPゴシック" panose="020B0400000000000000" pitchFamily="50" charset="-128"/>
-                        </a:rPr>
-                        <a:t>・外部ショックの</a:t>
+                        <a:rPr kumimoji="1" lang="ja-JP" altLang="en-US" sz="1600" b="1" dirty="0">
+                          <a:latin typeface="BIZ UDPゴシック" panose="020B0400000000000000" pitchFamily="50" charset="-128"/>
+                          <a:ea typeface="BIZ UDPゴシック" panose="020B0400000000000000" pitchFamily="50" charset="-128"/>
+                        </a:rPr>
+                        <a:t>・【収益力（分子）】</a:t>
                       </a:r>
                       <a:r>
                         <a:rPr kumimoji="1" lang="ja-JP" altLang="en-US" sz="1600" dirty="0">
@@ -9673,14 +9694,14 @@
                           <a:latin typeface="BIZ UDPゴシック" panose="020B0400000000000000" pitchFamily="50" charset="-128"/>
                           <a:ea typeface="BIZ UDPゴシック" panose="020B0400000000000000" pitchFamily="50" charset="-128"/>
                         </a:rPr>
-                        <a:t>事前検知と先手の資源再配置</a:t>
+                        <a:t>未達の未然防止と先手の資源再配置</a:t>
                       </a:r>
                       <a:r>
                         <a:rPr kumimoji="1" lang="ja-JP" altLang="en-US" sz="1600" dirty="0">
                           <a:latin typeface="BIZ UDPゴシック" panose="020B0400000000000000" pitchFamily="50" charset="-128"/>
                           <a:ea typeface="BIZ UDPゴシック" panose="020B0400000000000000" pitchFamily="50" charset="-128"/>
                         </a:rPr>
-                        <a:t>　・・・業績下振れサプライズの排除</a:t>
+                        <a:t>　・・・中計達成の蓋然性向上</a:t>
                       </a:r>
                       <a:endParaRPr kumimoji="1" lang="ja-JP" altLang="en-US" sz="1600" dirty="0">
                         <a:latin typeface="BIZ UDPゴシック" panose="020B0400000000000000" pitchFamily="50" charset="-128"/>
@@ -9689,11 +9710,11 @@
                     </a:p>
                     <a:p>
                       <a:r>
-                        <a:rPr kumimoji="1" lang="ja-JP" altLang="en-US" sz="1600" dirty="0">
-                          <a:latin typeface="BIZ UDPゴシック" panose="020B0400000000000000" pitchFamily="50" charset="-128"/>
-                          <a:ea typeface="BIZ UDPゴシック" panose="020B0400000000000000" pitchFamily="50" charset="-128"/>
-                        </a:rPr>
-                        <a:t>・楽観を排した</a:t>
+                        <a:rPr kumimoji="1" lang="ja-JP" altLang="en-US" sz="1600" b="1" dirty="0">
+                          <a:latin typeface="BIZ UDPゴシック" panose="020B0400000000000000" pitchFamily="50" charset="-128"/>
+                          <a:ea typeface="BIZ UDPゴシック" panose="020B0400000000000000" pitchFamily="50" charset="-128"/>
+                        </a:rPr>
+                        <a:t>・【資本コスト（分母）】</a:t>
                       </a:r>
                       <a:r>
                         <a:rPr kumimoji="1" lang="ja-JP" altLang="en-US" sz="1600" dirty="0">
@@ -9703,14 +9724,44 @@
                           <a:latin typeface="BIZ UDPゴシック" panose="020B0400000000000000" pitchFamily="50" charset="-128"/>
                           <a:ea typeface="BIZ UDPゴシック" panose="020B0400000000000000" pitchFamily="50" charset="-128"/>
                         </a:rPr>
-                        <a:t>データドリブン経営</a:t>
+                        <a:t>下振れサプライズの排除</a:t>
                       </a:r>
                       <a:r>
                         <a:rPr kumimoji="1" lang="ja-JP" altLang="en-US" sz="1600" dirty="0">
                           <a:latin typeface="BIZ UDPゴシック" panose="020B0400000000000000" pitchFamily="50" charset="-128"/>
                           <a:ea typeface="BIZ UDPゴシック" panose="020B0400000000000000" pitchFamily="50" charset="-128"/>
                         </a:rPr>
-                        <a:t>　・・・中計コミット達成の蓋然性向上</a:t>
+                        <a:t>　・・・業績予想の信頼性向上</a:t>
+                      </a:r>
+                      <a:endParaRPr kumimoji="1" lang="ja-JP" altLang="en-US" sz="1600" dirty="0">
+                        <a:latin typeface="BIZ UDPゴシック" panose="020B0400000000000000" pitchFamily="50" charset="-128"/>
+                        <a:ea typeface="BIZ UDPゴシック" panose="020B0400000000000000" pitchFamily="50" charset="-128"/>
+                      </a:endParaRPr>
+                    </a:p>
+                    <a:p>
+                      <a:r>
+                        <a:rPr kumimoji="1" lang="ja-JP" altLang="en-US" sz="1600" b="1" dirty="0">
+                          <a:latin typeface="BIZ UDPゴシック" panose="020B0400000000000000" pitchFamily="50" charset="-128"/>
+                          <a:ea typeface="BIZ UDPゴシック" panose="020B0400000000000000" pitchFamily="50" charset="-128"/>
+                        </a:rPr>
+                        <a:t>・【生産性（実行力）】</a:t>
+                      </a:r>
+                      <a:r>
+                        <a:rPr kumimoji="1" lang="ja-JP" altLang="en-US" sz="1600" dirty="0">
+                          <a:solidFill>
+                            <a:srgbClr val="00B0F0"/>
+                          </a:solidFill>
+                          <a:latin typeface="BIZ UDPゴシック" panose="020B0400000000000000" pitchFamily="50" charset="-128"/>
+                          <a:ea typeface="BIZ UDPゴシック" panose="020B0400000000000000" pitchFamily="50" charset="-128"/>
+                        </a:rPr>
+                        <a:t>意思決定の早期化・質向上</a:t>
+                      </a:r>
+                      <a:r>
+                        <a:rPr kumimoji="1" lang="ja-JP" altLang="en-US" sz="1600" dirty="0">
+                          <a:latin typeface="BIZ UDPゴシック" panose="020B0400000000000000" pitchFamily="50" charset="-128"/>
+                          <a:ea typeface="BIZ UDPゴシック" panose="020B0400000000000000" pitchFamily="50" charset="-128"/>
+                        </a:rPr>
+                        <a:t>　・・・付加価値業務への労力シフト</a:t>
                       </a:r>
                       <a:endParaRPr kumimoji="1" lang="ja-JP" altLang="en-US" sz="1600" dirty="0">
                         <a:latin typeface="BIZ UDPゴシック" panose="020B0400000000000000" pitchFamily="50" charset="-128"/>
